--- a/slides/decks/L00-environment.pptx
+++ b/slides/decks/L00-environment.pptx
@@ -118,13 +118,13 @@
   <p:extLst>
     <p:ext uri="{521415D9-36F7-43E2-AB2F-B90AF26B5E84}">
       <p14:sectionLst xmlns:p14="http://schemas.microsoft.com/office/powerpoint/2010/main">
-        <p14:section name="开场" id="{09177fc3-e79a-b3d7-b3df-4d56a53e0e68}">
+        <p14:section name="开场" id="{82688725-2ce1-b081-2ce0-27c74d399880}">
           <p14:sldIdLst>
             <p14:sldId id="256"/>
             <p14:sldId id="257"/>
           </p14:sldIdLst>
         </p14:section>
-        <p14:section name="讲解" id="{dfdc39de-9539-753f-fa1e-1702d5a773fc}">
+        <p14:section name="讲解" id="{03d4eb3c-bc56-cc8b-a236-cbf7f80717b9}">
           <p14:sldIdLst>
             <p14:sldId id="258"/>
             <p14:sldId id="259"/>
@@ -135,13 +135,13 @@
             <p14:sldId id="264"/>
           </p14:sldIdLst>
         </p14:section>
-        <p14:section name="练习" id="{064a1cb9-3814-38db-0195-0172fd6acc16}">
+        <p14:section name="练习" id="{9f2b112b-40ed-8f15-8869-6803c2dfb396}">
           <p14:sldIdLst>
             <p14:sldId id="265"/>
             <p14:sldId id="266"/>
           </p14:sldIdLst>
         </p14:section>
-        <p14:section name="收束" id="{f1db68b1-14fb-8dbc-9b8f-6b1be5cdc180}">
+        <p14:section name="收束" id="{50a9ca1b-1c46-49d3-792f-cc90c5179bac}">
           <p14:sldIdLst>
             <p14:sldId id="267"/>
           </p14:sldIdLst>
